--- a/session2/exam-strategy/q1/q1_exam_strategy.pptx
+++ b/session2/exam-strategy/q1/q1_exam_strategy.pptx
@@ -3187,8 +3187,8 @@
         </p:nvSpPr>
         <p:spPr>
           <a:xfrm>
-            <a:off x="274320" y="685800"/>
-            <a:ext cx="6400800" cy="1645920"/>
+            <a:off x="274320" y="640080"/>
+            <a:ext cx="6583680" cy="1280160"/>
           </a:xfrm>
           <a:prstGeom prst="rect">
             <a:avLst/>
@@ -3196,13 +3196,13 @@
           <a:noFill/>
         </p:spPr>
         <p:txBody>
-          <a:bodyPr wrap="square">
+          <a:bodyPr wrap="square" tIns="0" bIns="0">
             <a:spAutoFit/>
           </a:bodyPr>
           <a:lstStyle/>
           <a:p>
             <a:pPr>
-              <a:defRPr sz="1100">
+              <a:defRPr sz="900">
                 <a:solidFill>
                   <a:srgbClr val="FFFFFF"/>
                 </a:solidFill>
@@ -3210,7 +3210,7 @@
               </a:defRPr>
             </a:pPr>
             <a:r>
-              <a:t>A developer is testing an application locally and has deployed the application to an AWS Lambda function. To avoid exceeding the deployment package size quota, the developer did not include the dependencies in the deployment file. When the developer tests the application remotely, the Lambda function does not run because of missing dependencies. Which solution will resolve this issue?</a:t>
+              <a:t>A developer is testing an application locally and has deployed the application to an AWS Lambda function. To avoid exceeding the deployment package size quota, the developer did not include the dependencies in the deployment file. When the developer tests the application remotely, the Lambda function does not run because of missing dependencies....</a:t>
             </a:r>
           </a:p>
         </p:txBody>
@@ -3223,8 +3223,8 @@
         </p:nvSpPr>
         <p:spPr>
           <a:xfrm>
-            <a:off x="365760" y="2377440"/>
-            <a:ext cx="274320" cy="274320"/>
+            <a:off x="274320" y="2057400"/>
+            <a:ext cx="201168" cy="201168"/>
           </a:xfrm>
           <a:prstGeom prst="ellipse">
             <a:avLst/>
@@ -3255,7 +3255,7 @@
           <a:lstStyle/>
           <a:p>
             <a:pPr algn="ctr">
-              <a:defRPr sz="900" b="1">
+              <a:defRPr sz="700" b="1">
                 <a:solidFill>
                   <a:srgbClr val="FFFFFF"/>
                 </a:solidFill>
@@ -3275,8 +3275,8 @@
         </p:nvSpPr>
         <p:spPr>
           <a:xfrm>
-            <a:off x="777240" y="2377440"/>
-            <a:ext cx="5943600" cy="411480"/>
+            <a:off x="548640" y="2011680"/>
+            <a:ext cx="6400800" cy="736092"/>
           </a:xfrm>
           <a:prstGeom prst="rect">
             <a:avLst/>
@@ -3284,13 +3284,13 @@
           <a:noFill/>
         </p:spPr>
         <p:txBody>
-          <a:bodyPr wrap="square">
+          <a:bodyPr wrap="square" tIns="25400" bIns="0" lIns="0">
             <a:spAutoFit/>
           </a:bodyPr>
           <a:lstStyle/>
           <a:p>
             <a:pPr>
-              <a:defRPr sz="1000">
+              <a:defRPr sz="800">
                 <a:solidFill>
                   <a:srgbClr val="CCCCCC"/>
                 </a:solidFill>
@@ -3311,8 +3311,8 @@
         </p:nvSpPr>
         <p:spPr>
           <a:xfrm>
-            <a:off x="365760" y="2834640"/>
-            <a:ext cx="274320" cy="274320"/>
+            <a:off x="274320" y="2811780"/>
+            <a:ext cx="201168" cy="201168"/>
           </a:xfrm>
           <a:prstGeom prst="ellipse">
             <a:avLst/>
@@ -3343,7 +3343,7 @@
           <a:lstStyle/>
           <a:p>
             <a:pPr algn="ctr">
-              <a:defRPr sz="900" b="1">
+              <a:defRPr sz="700" b="1">
                 <a:solidFill>
                   <a:srgbClr val="FFFFFF"/>
                 </a:solidFill>
@@ -3363,8 +3363,8 @@
         </p:nvSpPr>
         <p:spPr>
           <a:xfrm>
-            <a:off x="777240" y="2834640"/>
-            <a:ext cx="5943600" cy="411480"/>
+            <a:off x="548640" y="2766060"/>
+            <a:ext cx="6400800" cy="736092"/>
           </a:xfrm>
           <a:prstGeom prst="rect">
             <a:avLst/>
@@ -3372,13 +3372,13 @@
           <a:noFill/>
         </p:spPr>
         <p:txBody>
-          <a:bodyPr wrap="square">
+          <a:bodyPr wrap="square" tIns="25400" bIns="0" lIns="0">
             <a:spAutoFit/>
           </a:bodyPr>
           <a:lstStyle/>
           <a:p>
             <a:pPr>
-              <a:defRPr sz="1000">
+              <a:defRPr sz="800">
                 <a:solidFill>
                   <a:srgbClr val="CCCCCC"/>
                 </a:solidFill>
@@ -3386,7 +3386,7 @@
               </a:defRPr>
             </a:pPr>
             <a:r>
-              <a:t>Create an additional .zip file that contains the missing dependencies. Include the .zip file in the original Lambda deployment package.</a:t>
+              <a:t>Create an additional .zip file that contains the missing dependencies...</a:t>
             </a:r>
           </a:p>
         </p:txBody>
@@ -3399,8 +3399,8 @@
         </p:nvSpPr>
         <p:spPr>
           <a:xfrm>
-            <a:off x="365760" y="3291840"/>
-            <a:ext cx="274320" cy="274320"/>
+            <a:off x="274320" y="3566160"/>
+            <a:ext cx="201168" cy="201168"/>
           </a:xfrm>
           <a:prstGeom prst="ellipse">
             <a:avLst/>
@@ -3431,7 +3431,7 @@
           <a:lstStyle/>
           <a:p>
             <a:pPr algn="ctr">
-              <a:defRPr sz="900" b="1">
+              <a:defRPr sz="700" b="1">
                 <a:solidFill>
                   <a:srgbClr val="FFFFFF"/>
                 </a:solidFill>
@@ -3451,8 +3451,8 @@
         </p:nvSpPr>
         <p:spPr>
           <a:xfrm>
-            <a:off x="777240" y="3291840"/>
-            <a:ext cx="5943600" cy="411480"/>
+            <a:off x="548640" y="3520440"/>
+            <a:ext cx="6400800" cy="736092"/>
           </a:xfrm>
           <a:prstGeom prst="rect">
             <a:avLst/>
@@ -3460,13 +3460,13 @@
           <a:noFill/>
         </p:spPr>
         <p:txBody>
-          <a:bodyPr wrap="square">
+          <a:bodyPr wrap="square" tIns="25400" bIns="0" lIns="0">
             <a:spAutoFit/>
           </a:bodyPr>
           <a:lstStyle/>
           <a:p>
             <a:pPr>
-              <a:defRPr sz="1000">
+              <a:defRPr sz="800">
                 <a:solidFill>
                   <a:srgbClr val="CCCCCC"/>
                 </a:solidFill>
@@ -3487,8 +3487,8 @@
         </p:nvSpPr>
         <p:spPr>
           <a:xfrm>
-            <a:off x="365760" y="3749039"/>
-            <a:ext cx="274320" cy="274320"/>
+            <a:off x="274320" y="4320540"/>
+            <a:ext cx="201168" cy="201168"/>
           </a:xfrm>
           <a:prstGeom prst="ellipse">
             <a:avLst/>
@@ -3519,7 +3519,7 @@
           <a:lstStyle/>
           <a:p>
             <a:pPr algn="ctr">
-              <a:defRPr sz="900" b="1">
+              <a:defRPr sz="700" b="1">
                 <a:solidFill>
                   <a:srgbClr val="FFFFFF"/>
                 </a:solidFill>
@@ -3539,8 +3539,8 @@
         </p:nvSpPr>
         <p:spPr>
           <a:xfrm>
-            <a:off x="777240" y="3749039"/>
-            <a:ext cx="5943600" cy="411480"/>
+            <a:off x="548640" y="4274820"/>
+            <a:ext cx="6400800" cy="736092"/>
           </a:xfrm>
           <a:prstGeom prst="rect">
             <a:avLst/>
@@ -3548,13 +3548,13 @@
           <a:noFill/>
         </p:spPr>
         <p:txBody>
-          <a:bodyPr wrap="square">
+          <a:bodyPr wrap="square" tIns="25400" bIns="0" lIns="0">
             <a:spAutoFit/>
           </a:bodyPr>
           <a:lstStyle/>
           <a:p>
             <a:pPr>
-              <a:defRPr sz="1000">
+              <a:defRPr sz="800">
                 <a:solidFill>
                   <a:srgbClr val="CCCCCC"/>
                 </a:solidFill>
@@ -3844,8 +3844,8 @@
         </p:blipFill>
         <p:spPr>
           <a:xfrm>
-            <a:off x="182880" y="914400"/>
-            <a:ext cx="3228638" cy="3840480"/>
+            <a:off x="182880" y="1154164"/>
+            <a:ext cx="5303520" cy="3360951"/>
           </a:xfrm>
           <a:prstGeom prst="rect">
             <a:avLst/>
@@ -3980,9 +3980,9 @@
           <a:p>
             <a:pPr>
               <a:spcAft>
-                <a:spcPts val="600"/>
+                <a:spcPts val="400"/>
               </a:spcAft>
-              <a:defRPr sz="900">
+              <a:defRPr sz="800">
                 <a:solidFill>
                   <a:srgbClr val="212121"/>
                 </a:solidFill>
@@ -3990,7 +3990,7 @@
               </a:defRPr>
             </a:pPr>
             <a:r>
-              <a:t>• because this will not necessarily avoid exceeding the deployment package size quota</a:t>
+              <a:t>• Because this will not necessarily avoid exceeding the deployment package size quota</a:t>
             </a:r>
           </a:p>
         </p:txBody>
@@ -4170,7 +4170,7 @@
         <p:spPr>
           <a:xfrm>
             <a:off x="182880" y="914400"/>
-            <a:ext cx="3228638" cy="3840480"/>
+            <a:ext cx="3509506" cy="3840480"/>
           </a:xfrm>
           <a:prstGeom prst="rect">
             <a:avLst/>
@@ -4305,9 +4305,9 @@
           <a:p>
             <a:pPr>
               <a:spcAft>
-                <a:spcPts val="600"/>
+                <a:spcPts val="400"/>
               </a:spcAft>
-              <a:defRPr sz="900">
+              <a:defRPr sz="800">
                 <a:solidFill>
                   <a:srgbClr val="212121"/>
                 </a:solidFill>
@@ -4315,15 +4315,15 @@
               </a:defRPr>
             </a:pPr>
             <a:r>
-              <a:t>• because this will not necessarily avoid exceeding the deployment package size quota.</a:t>
+              <a:t>• Because this will not necessarily avoid exceeding the deployment package size quota</a:t>
             </a:r>
           </a:p>
           <a:p>
             <a:pPr>
               <a:spcAft>
-                <a:spcPts val="600"/>
+                <a:spcPts val="400"/>
               </a:spcAft>
-              <a:defRPr sz="900">
+              <a:defRPr sz="800">
                 <a:solidFill>
                   <a:srgbClr val="212121"/>
                 </a:solidFill>
@@ -4331,7 +4331,7 @@
               </a:defRPr>
             </a:pPr>
             <a:r>
-              <a:t>• Even when you zip it.</a:t>
+              <a:t>• Even when you zip it</a:t>
             </a:r>
           </a:p>
         </p:txBody>
@@ -4510,8 +4510,8 @@
         </p:blipFill>
         <p:spPr>
           <a:xfrm>
-            <a:off x="182880" y="914400"/>
-            <a:ext cx="3228638" cy="3840480"/>
+            <a:off x="182880" y="1213411"/>
+            <a:ext cx="5303520" cy="3242456"/>
           </a:xfrm>
           <a:prstGeom prst="rect">
             <a:avLst/>
@@ -4646,9 +4646,9 @@
           <a:p>
             <a:pPr>
               <a:spcAft>
-                <a:spcPts val="600"/>
+                <a:spcPts val="400"/>
               </a:spcAft>
-              <a:defRPr sz="900">
+              <a:defRPr sz="800">
                 <a:solidFill>
                   <a:srgbClr val="212121"/>
                 </a:solidFill>
@@ -4656,15 +4656,15 @@
               </a:defRPr>
             </a:pPr>
             <a:r>
-              <a:t>• because Lambda environment variables are pairs of strings that is stored in a function's version-specific configuration.</a:t>
+              <a:t>• Because Lambda environment variables are pairs of strings that is stored in a function's version-specific configuration</a:t>
             </a:r>
           </a:p>
           <a:p>
             <a:pPr>
               <a:spcAft>
-                <a:spcPts val="600"/>
+                <a:spcPts val="400"/>
               </a:spcAft>
-              <a:defRPr sz="900">
+              <a:defRPr sz="800">
                 <a:solidFill>
                   <a:srgbClr val="212121"/>
                 </a:solidFill>
@@ -4672,15 +4672,15 @@
               </a:defRPr>
             </a:pPr>
             <a:r>
-              <a:t>• The Lambda runtime makes environment variables available to your code and sets additional environment variables that contain information about the function and invocation request.</a:t>
+              <a:t>• The Lambda runtime makes environment variables available to your code and sets additional environment variables that contain information about the function and invocation request</a:t>
             </a:r>
           </a:p>
           <a:p>
             <a:pPr>
               <a:spcAft>
-                <a:spcPts val="600"/>
+                <a:spcPts val="400"/>
               </a:spcAft>
-              <a:defRPr sz="900">
+              <a:defRPr sz="800">
                 <a:solidFill>
                   <a:srgbClr val="212121"/>
                 </a:solidFill>
@@ -4688,7 +4688,7 @@
               </a:defRPr>
             </a:pPr>
             <a:r>
-              <a:t>• They’re not meant to store missing dependencies.</a:t>
+              <a:t>• They’re not meant to store missing dependencies</a:t>
             </a:r>
           </a:p>
         </p:txBody>
@@ -4868,7 +4868,7 @@
         <p:spPr>
           <a:xfrm>
             <a:off x="182880" y="914400"/>
-            <a:ext cx="3115683" cy="3840480"/>
+            <a:ext cx="4083320" cy="3840480"/>
           </a:xfrm>
           <a:prstGeom prst="rect">
             <a:avLst/>
@@ -5003,9 +5003,9 @@
           <a:p>
             <a:pPr>
               <a:spcAft>
-                <a:spcPts val="600"/>
+                <a:spcPts val="400"/>
               </a:spcAft>
-              <a:defRPr sz="900">
+              <a:defRPr sz="800">
                 <a:solidFill>
                   <a:srgbClr val="212121"/>
                 </a:solidFill>
@@ -5013,15 +5013,15 @@
               </a:defRPr>
             </a:pPr>
             <a:r>
-              <a:t>• You can configure an AWS Lambda function to pull in additional code and content in the form of layers.</a:t>
+              <a:t>• You can configure an AWS Lambda function to pull in additional code and content in the form of layers</a:t>
             </a:r>
           </a:p>
           <a:p>
             <a:pPr>
               <a:spcAft>
-                <a:spcPts val="600"/>
+                <a:spcPts val="400"/>
               </a:spcAft>
-              <a:defRPr sz="900">
+              <a:defRPr sz="800">
                 <a:solidFill>
                   <a:srgbClr val="212121"/>
                 </a:solidFill>
@@ -5029,15 +5029,15 @@
               </a:defRPr>
             </a:pPr>
             <a:r>
-              <a:t>• A layer is a .zip file archive that contains libraries, a custom runtime, or other dependencies.</a:t>
+              <a:t>• A layer is a .zip file archive that contains libraries</a:t>
             </a:r>
           </a:p>
           <a:p>
             <a:pPr>
               <a:spcAft>
-                <a:spcPts val="600"/>
+                <a:spcPts val="400"/>
               </a:spcAft>
-              <a:defRPr sz="900">
+              <a:defRPr sz="800">
                 <a:solidFill>
                   <a:srgbClr val="212121"/>
                 </a:solidFill>
@@ -5045,7 +5045,39 @@
               </a:defRPr>
             </a:pPr>
             <a:r>
-              <a:t>• With layers, you can use libraries in a Lambda function without needing to include the libraries in a deployment package.</a:t>
+              <a:t>• A custom runtime</a:t>
+            </a:r>
+          </a:p>
+          <a:p>
+            <a:pPr>
+              <a:spcAft>
+                <a:spcPts val="400"/>
+              </a:spcAft>
+              <a:defRPr sz="800">
+                <a:solidFill>
+                  <a:srgbClr val="212121"/>
+                </a:solidFill>
+                <a:latin typeface="Segoe UI"/>
+              </a:defRPr>
+            </a:pPr>
+            <a:r>
+              <a:t>• Or other dependencies</a:t>
+            </a:r>
+          </a:p>
+          <a:p>
+            <a:pPr>
+              <a:spcAft>
+                <a:spcPts val="400"/>
+              </a:spcAft>
+              <a:defRPr sz="800">
+                <a:solidFill>
+                  <a:srgbClr val="212121"/>
+                </a:solidFill>
+                <a:latin typeface="Segoe UI"/>
+              </a:defRPr>
+            </a:pPr>
+            <a:r>
+              <a:t>• With layers, you can use libraries in a Lambda function without needing to include the libraries in a deployment package</a:t>
             </a:r>
           </a:p>
         </p:txBody>

--- a/session2/exam-strategy/q1/q1_exam_strategy.pptx
+++ b/session2/exam-strategy/q1/q1_exam_strategy.pptx
@@ -3187,8 +3187,8 @@
         </p:nvSpPr>
         <p:spPr>
           <a:xfrm>
-            <a:off x="274320" y="640080"/>
-            <a:ext cx="6583680" cy="1280160"/>
+            <a:off x="274320" y="685800"/>
+            <a:ext cx="6400800" cy="1645920"/>
           </a:xfrm>
           <a:prstGeom prst="rect">
             <a:avLst/>
@@ -3196,13 +3196,13 @@
           <a:noFill/>
         </p:spPr>
         <p:txBody>
-          <a:bodyPr wrap="square" tIns="0" bIns="0">
+          <a:bodyPr wrap="square">
             <a:spAutoFit/>
           </a:bodyPr>
           <a:lstStyle/>
           <a:p>
             <a:pPr>
-              <a:defRPr sz="900">
+              <a:defRPr sz="1100">
                 <a:solidFill>
                   <a:srgbClr val="FFFFFF"/>
                 </a:solidFill>
@@ -3210,7 +3210,7 @@
               </a:defRPr>
             </a:pPr>
             <a:r>
-              <a:t>A developer is testing an application locally and has deployed the application to an AWS Lambda function. To avoid exceeding the deployment package size quota, the developer did not include the dependencies in the deployment file. When the developer tests the application remotely, the Lambda function does not run because of missing dependencies....</a:t>
+              <a:t>A developer is testing an application locally and has deployed the application to an AWS Lambda function. To avoid exceeding the deployment package size quota, the developer did not include the dependencies in the deployment file. When the developer tests the application remotely, the Lambda function does not run because of missing dependencies. Which solution will resolve this issue?</a:t>
             </a:r>
           </a:p>
         </p:txBody>
@@ -3223,8 +3223,8 @@
         </p:nvSpPr>
         <p:spPr>
           <a:xfrm>
-            <a:off x="274320" y="2057400"/>
-            <a:ext cx="201168" cy="201168"/>
+            <a:off x="365760" y="2377440"/>
+            <a:ext cx="274320" cy="274320"/>
           </a:xfrm>
           <a:prstGeom prst="ellipse">
             <a:avLst/>
@@ -3255,7 +3255,7 @@
           <a:lstStyle/>
           <a:p>
             <a:pPr algn="ctr">
-              <a:defRPr sz="700" b="1">
+              <a:defRPr sz="900" b="1">
                 <a:solidFill>
                   <a:srgbClr val="FFFFFF"/>
                 </a:solidFill>
@@ -3275,8 +3275,8 @@
         </p:nvSpPr>
         <p:spPr>
           <a:xfrm>
-            <a:off x="548640" y="2011680"/>
-            <a:ext cx="6400800" cy="736092"/>
+            <a:off x="777240" y="2377440"/>
+            <a:ext cx="5943600" cy="411480"/>
           </a:xfrm>
           <a:prstGeom prst="rect">
             <a:avLst/>
@@ -3284,13 +3284,13 @@
           <a:noFill/>
         </p:spPr>
         <p:txBody>
-          <a:bodyPr wrap="square" tIns="25400" bIns="0" lIns="0">
+          <a:bodyPr wrap="square">
             <a:spAutoFit/>
           </a:bodyPr>
           <a:lstStyle/>
           <a:p>
             <a:pPr>
-              <a:defRPr sz="800">
+              <a:defRPr sz="1000">
                 <a:solidFill>
                   <a:srgbClr val="CCCCCC"/>
                 </a:solidFill>
@@ -3311,8 +3311,8 @@
         </p:nvSpPr>
         <p:spPr>
           <a:xfrm>
-            <a:off x="274320" y="2811780"/>
-            <a:ext cx="201168" cy="201168"/>
+            <a:off x="365760" y="2834640"/>
+            <a:ext cx="274320" cy="274320"/>
           </a:xfrm>
           <a:prstGeom prst="ellipse">
             <a:avLst/>
@@ -3343,7 +3343,7 @@
           <a:lstStyle/>
           <a:p>
             <a:pPr algn="ctr">
-              <a:defRPr sz="700" b="1">
+              <a:defRPr sz="900" b="1">
                 <a:solidFill>
                   <a:srgbClr val="FFFFFF"/>
                 </a:solidFill>
@@ -3363,8 +3363,8 @@
         </p:nvSpPr>
         <p:spPr>
           <a:xfrm>
-            <a:off x="548640" y="2766060"/>
-            <a:ext cx="6400800" cy="736092"/>
+            <a:off x="777240" y="2834640"/>
+            <a:ext cx="5943600" cy="411480"/>
           </a:xfrm>
           <a:prstGeom prst="rect">
             <a:avLst/>
@@ -3372,13 +3372,13 @@
           <a:noFill/>
         </p:spPr>
         <p:txBody>
-          <a:bodyPr wrap="square" tIns="25400" bIns="0" lIns="0">
+          <a:bodyPr wrap="square">
             <a:spAutoFit/>
           </a:bodyPr>
           <a:lstStyle/>
           <a:p>
             <a:pPr>
-              <a:defRPr sz="800">
+              <a:defRPr sz="1000">
                 <a:solidFill>
                   <a:srgbClr val="CCCCCC"/>
                 </a:solidFill>
@@ -3386,7 +3386,7 @@
               </a:defRPr>
             </a:pPr>
             <a:r>
-              <a:t>Create an additional .zip file that contains the missing dependencies...</a:t>
+              <a:t>Create an additional .zip file that contains the missing dependencies. Include the .zip file in the original Lambda deployment package.</a:t>
             </a:r>
           </a:p>
         </p:txBody>
@@ -3399,8 +3399,8 @@
         </p:nvSpPr>
         <p:spPr>
           <a:xfrm>
-            <a:off x="274320" y="3566160"/>
-            <a:ext cx="201168" cy="201168"/>
+            <a:off x="365760" y="3291840"/>
+            <a:ext cx="274320" cy="274320"/>
           </a:xfrm>
           <a:prstGeom prst="ellipse">
             <a:avLst/>
@@ -3431,7 +3431,7 @@
           <a:lstStyle/>
           <a:p>
             <a:pPr algn="ctr">
-              <a:defRPr sz="700" b="1">
+              <a:defRPr sz="900" b="1">
                 <a:solidFill>
                   <a:srgbClr val="FFFFFF"/>
                 </a:solidFill>
@@ -3451,8 +3451,8 @@
         </p:nvSpPr>
         <p:spPr>
           <a:xfrm>
-            <a:off x="548640" y="3520440"/>
-            <a:ext cx="6400800" cy="736092"/>
+            <a:off x="777240" y="3291840"/>
+            <a:ext cx="5943600" cy="411480"/>
           </a:xfrm>
           <a:prstGeom prst="rect">
             <a:avLst/>
@@ -3460,13 +3460,13 @@
           <a:noFill/>
         </p:spPr>
         <p:txBody>
-          <a:bodyPr wrap="square" tIns="25400" bIns="0" lIns="0">
+          <a:bodyPr wrap="square">
             <a:spAutoFit/>
           </a:bodyPr>
           <a:lstStyle/>
           <a:p>
             <a:pPr>
-              <a:defRPr sz="800">
+              <a:defRPr sz="1000">
                 <a:solidFill>
                   <a:srgbClr val="CCCCCC"/>
                 </a:solidFill>
@@ -3487,8 +3487,8 @@
         </p:nvSpPr>
         <p:spPr>
           <a:xfrm>
-            <a:off x="274320" y="4320540"/>
-            <a:ext cx="201168" cy="201168"/>
+            <a:off x="365760" y="3749039"/>
+            <a:ext cx="274320" cy="274320"/>
           </a:xfrm>
           <a:prstGeom prst="ellipse">
             <a:avLst/>
@@ -3519,7 +3519,7 @@
           <a:lstStyle/>
           <a:p>
             <a:pPr algn="ctr">
-              <a:defRPr sz="700" b="1">
+              <a:defRPr sz="900" b="1">
                 <a:solidFill>
                   <a:srgbClr val="FFFFFF"/>
                 </a:solidFill>
@@ -3539,8 +3539,8 @@
         </p:nvSpPr>
         <p:spPr>
           <a:xfrm>
-            <a:off x="548640" y="4274820"/>
-            <a:ext cx="6400800" cy="736092"/>
+            <a:off x="777240" y="3749039"/>
+            <a:ext cx="5943600" cy="411480"/>
           </a:xfrm>
           <a:prstGeom prst="rect">
             <a:avLst/>
@@ -3548,13 +3548,13 @@
           <a:noFill/>
         </p:spPr>
         <p:txBody>
-          <a:bodyPr wrap="square" tIns="25400" bIns="0" lIns="0">
+          <a:bodyPr wrap="square">
             <a:spAutoFit/>
           </a:bodyPr>
           <a:lstStyle/>
           <a:p>
             <a:pPr>
-              <a:defRPr sz="800">
+              <a:defRPr sz="1000">
                 <a:solidFill>
                   <a:srgbClr val="CCCCCC"/>
                 </a:solidFill>
@@ -3844,8 +3844,8 @@
         </p:blipFill>
         <p:spPr>
           <a:xfrm>
-            <a:off x="182880" y="1154164"/>
-            <a:ext cx="5303520" cy="3360951"/>
+            <a:off x="182880" y="1701261"/>
+            <a:ext cx="5303520" cy="2266757"/>
           </a:xfrm>
           <a:prstGeom prst="rect">
             <a:avLst/>
@@ -3980,9 +3980,9 @@
           <a:p>
             <a:pPr>
               <a:spcAft>
-                <a:spcPts val="400"/>
+                <a:spcPts val="600"/>
               </a:spcAft>
-              <a:defRPr sz="800">
+              <a:defRPr sz="900">
                 <a:solidFill>
                   <a:srgbClr val="212121"/>
                 </a:solidFill>
@@ -3990,7 +3990,7 @@
               </a:defRPr>
             </a:pPr>
             <a:r>
-              <a:t>• Because this will not necessarily avoid exceeding the deployment package size quota</a:t>
+              <a:t>• because this will not necessarily avoid exceeding the deployment package size quota</a:t>
             </a:r>
           </a:p>
         </p:txBody>
@@ -4169,8 +4169,8 @@
         </p:blipFill>
         <p:spPr>
           <a:xfrm>
-            <a:off x="182880" y="914400"/>
-            <a:ext cx="3509506" cy="3840480"/>
+            <a:off x="182880" y="1714699"/>
+            <a:ext cx="5303520" cy="2239881"/>
           </a:xfrm>
           <a:prstGeom prst="rect">
             <a:avLst/>
@@ -4305,9 +4305,9 @@
           <a:p>
             <a:pPr>
               <a:spcAft>
-                <a:spcPts val="400"/>
+                <a:spcPts val="600"/>
               </a:spcAft>
-              <a:defRPr sz="800">
+              <a:defRPr sz="900">
                 <a:solidFill>
                   <a:srgbClr val="212121"/>
                 </a:solidFill>
@@ -4315,15 +4315,15 @@
               </a:defRPr>
             </a:pPr>
             <a:r>
-              <a:t>• Because this will not necessarily avoid exceeding the deployment package size quota</a:t>
+              <a:t>• because this will not necessarily avoid exceeding the deployment package size quota.</a:t>
             </a:r>
           </a:p>
           <a:p>
             <a:pPr>
               <a:spcAft>
-                <a:spcPts val="400"/>
+                <a:spcPts val="600"/>
               </a:spcAft>
-              <a:defRPr sz="800">
+              <a:defRPr sz="900">
                 <a:solidFill>
                   <a:srgbClr val="212121"/>
                 </a:solidFill>
@@ -4331,7 +4331,7 @@
               </a:defRPr>
             </a:pPr>
             <a:r>
-              <a:t>• Even when you zip it</a:t>
+              <a:t>• Even when you zip it.</a:t>
             </a:r>
           </a:p>
         </p:txBody>
@@ -4510,8 +4510,8 @@
         </p:blipFill>
         <p:spPr>
           <a:xfrm>
-            <a:off x="182880" y="1213411"/>
-            <a:ext cx="5303520" cy="3242456"/>
+            <a:off x="182880" y="1732964"/>
+            <a:ext cx="5303520" cy="2203350"/>
           </a:xfrm>
           <a:prstGeom prst="rect">
             <a:avLst/>
@@ -4646,9 +4646,9 @@
           <a:p>
             <a:pPr>
               <a:spcAft>
-                <a:spcPts val="400"/>
+                <a:spcPts val="600"/>
               </a:spcAft>
-              <a:defRPr sz="800">
+              <a:defRPr sz="900">
                 <a:solidFill>
                   <a:srgbClr val="212121"/>
                 </a:solidFill>
@@ -4656,15 +4656,15 @@
               </a:defRPr>
             </a:pPr>
             <a:r>
-              <a:t>• Because Lambda environment variables are pairs of strings that is stored in a function's version-specific configuration</a:t>
+              <a:t>• because Lambda environment variables are pairs of strings that is stored in a function's version-specific configuration.</a:t>
             </a:r>
           </a:p>
           <a:p>
             <a:pPr>
               <a:spcAft>
-                <a:spcPts val="400"/>
+                <a:spcPts val="600"/>
               </a:spcAft>
-              <a:defRPr sz="800">
+              <a:defRPr sz="900">
                 <a:solidFill>
                   <a:srgbClr val="212121"/>
                 </a:solidFill>
@@ -4672,15 +4672,15 @@
               </a:defRPr>
             </a:pPr>
             <a:r>
-              <a:t>• The Lambda runtime makes environment variables available to your code and sets additional environment variables that contain information about the function and invocation request</a:t>
+              <a:t>• The Lambda runtime makes environment variables available to your code and sets additional environment variables that contain information about the function and invocation request.</a:t>
             </a:r>
           </a:p>
           <a:p>
             <a:pPr>
               <a:spcAft>
-                <a:spcPts val="400"/>
+                <a:spcPts val="600"/>
               </a:spcAft>
-              <a:defRPr sz="800">
+              <a:defRPr sz="900">
                 <a:solidFill>
                   <a:srgbClr val="212121"/>
                 </a:solidFill>
@@ -4688,7 +4688,7 @@
               </a:defRPr>
             </a:pPr>
             <a:r>
-              <a:t>• They’re not meant to store missing dependencies</a:t>
+              <a:t>• They’re not meant to store missing dependencies.</a:t>
             </a:r>
           </a:p>
         </p:txBody>
@@ -4867,8 +4867,8 @@
         </p:blipFill>
         <p:spPr>
           <a:xfrm>
-            <a:off x="182880" y="914400"/>
-            <a:ext cx="4083320" cy="3840480"/>
+            <a:off x="182880" y="1061660"/>
+            <a:ext cx="5303520" cy="3545958"/>
           </a:xfrm>
           <a:prstGeom prst="rect">
             <a:avLst/>
@@ -5003,9 +5003,9 @@
           <a:p>
             <a:pPr>
               <a:spcAft>
-                <a:spcPts val="400"/>
+                <a:spcPts val="600"/>
               </a:spcAft>
-              <a:defRPr sz="800">
+              <a:defRPr sz="900">
                 <a:solidFill>
                   <a:srgbClr val="212121"/>
                 </a:solidFill>
@@ -5013,15 +5013,15 @@
               </a:defRPr>
             </a:pPr>
             <a:r>
-              <a:t>• You can configure an AWS Lambda function to pull in additional code and content in the form of layers</a:t>
+              <a:t>• You can configure an AWS Lambda function to pull in additional code and content in the form of layers.</a:t>
             </a:r>
           </a:p>
           <a:p>
             <a:pPr>
               <a:spcAft>
-                <a:spcPts val="400"/>
+                <a:spcPts val="600"/>
               </a:spcAft>
-              <a:defRPr sz="800">
+              <a:defRPr sz="900">
                 <a:solidFill>
                   <a:srgbClr val="212121"/>
                 </a:solidFill>
@@ -5029,15 +5029,15 @@
               </a:defRPr>
             </a:pPr>
             <a:r>
-              <a:t>• A layer is a .zip file archive that contains libraries</a:t>
+              <a:t>• A layer is a .zip file archive that contains libraries, a custom runtime, or other dependencies.</a:t>
             </a:r>
           </a:p>
           <a:p>
             <a:pPr>
               <a:spcAft>
-                <a:spcPts val="400"/>
+                <a:spcPts val="600"/>
               </a:spcAft>
-              <a:defRPr sz="800">
+              <a:defRPr sz="900">
                 <a:solidFill>
                   <a:srgbClr val="212121"/>
                 </a:solidFill>
@@ -5045,39 +5045,7 @@
               </a:defRPr>
             </a:pPr>
             <a:r>
-              <a:t>• A custom runtime</a:t>
-            </a:r>
-          </a:p>
-          <a:p>
-            <a:pPr>
-              <a:spcAft>
-                <a:spcPts val="400"/>
-              </a:spcAft>
-              <a:defRPr sz="800">
-                <a:solidFill>
-                  <a:srgbClr val="212121"/>
-                </a:solidFill>
-                <a:latin typeface="Segoe UI"/>
-              </a:defRPr>
-            </a:pPr>
-            <a:r>
-              <a:t>• Or other dependencies</a:t>
-            </a:r>
-          </a:p>
-          <a:p>
-            <a:pPr>
-              <a:spcAft>
-                <a:spcPts val="400"/>
-              </a:spcAft>
-              <a:defRPr sz="800">
-                <a:solidFill>
-                  <a:srgbClr val="212121"/>
-                </a:solidFill>
-                <a:latin typeface="Segoe UI"/>
-              </a:defRPr>
-            </a:pPr>
-            <a:r>
-              <a:t>• With layers, you can use libraries in a Lambda function without needing to include the libraries in a deployment package</a:t>
+              <a:t>• With layers, you can use libraries in a Lambda function without needing to include the libraries in a deployment package.</a:t>
             </a:r>
           </a:p>
         </p:txBody>
